--- a/examples/repositories/slidefly-showcase/deck.pptx
+++ b/examples/repositories/slidefly-showcase/deck.pptx
@@ -212,6 +212,74 @@
         </p:nvSpPr>
         <p:spPr>
           <a:xfrm>
+            <a:off x="698500" y="1492250"/>
+            <a:ext cx="6985000" cy="2254250"/>
+          </a:xfrm>
+          <a:prstGeom prst="rect">
+            <a:avLst/>
+          </a:prstGeom>
+          <a:noFill/>
+          <a:ln>
+            <a:noFill/>
+          </a:ln>
+        </p:spPr>
+        <p:txBody>
+          <a:bodyPr wrap="square" lIns="0" tIns="0" rIns="0" bIns="0" anchor="t" rtlCol="0">
+            <a:noAutofit/>
+          </a:bodyPr>
+          <a:lstStyle/>
+          <a:p>
+            <a:pPr algn="l">
+              <a:lnSpc>
+                <a:spcPct val="100000"/>
+              </a:lnSpc>
+              <a:buNone/>
+            </a:pPr>
+            <a:r>
+              <a:rPr lang="vi-VN" sz="5750" b="1" dirty="0">
+                <a:solidFill>
+                  <a:srgbClr val="16201D">
+                    <a:alpha val="100000"/>
+                  </a:srgbClr>
+                </a:solidFill>
+                <a:latin typeface="Zen Kaku Gothic New"/>
+                <a:cs typeface="Zen Kaku Gothic New"/>
+              </a:rPr>
+              <a:t>街を歩く、</a:t>
+            </a:r>
+            <a:endParaRPr lang="vi-VN" sz="5750"/>
+          </a:p>
+          <a:p>
+            <a:pPr algn="l">
+              <a:lnSpc>
+                <a:spcPct val="100000"/>
+              </a:lnSpc>
+              <a:buNone/>
+            </a:pPr>
+            <a:r>
+              <a:rPr lang="vi-VN" sz="5750" b="1" dirty="0">
+                <a:solidFill>
+                  <a:srgbClr val="16201D">
+                    <a:alpha val="100000"/>
+                  </a:srgbClr>
+                </a:solidFill>
+                <a:latin typeface="Zen Kaku Gothic New"/>
+                <a:cs typeface="Zen Kaku Gothic New"/>
+              </a:rPr>
+              <a:t>寄り道を選ぶ。</a:t>
+            </a:r>
+            <a:endParaRPr lang="vi-VN" sz="5750"/>
+          </a:p>
+        </p:txBody>
+      </p:sp>
+      <p:sp>
+        <p:nvSpPr>
+          <p:cNvPr id="7" name="Text"/>
+          <p:cNvSpPr txBox="1"/>
+          <p:nvPr/>
+        </p:nvSpPr>
+        <p:spPr>
+          <a:xfrm>
             <a:off x="698500" y="4095750"/>
             <a:ext cx="6985000" cy="1301750"/>
           </a:xfrm>
@@ -245,7 +313,28 @@
                 <a:latin typeface="Zen Kaku Gothic New"/>
                 <a:cs typeface="Zen Kaku Gothic New"/>
               </a:rPr>
-              <a:t>気になる場所を一つだけ。 残りは、歩きながら決める。</a:t>
+              <a:t>気になる場所を一つだけ。</a:t>
+            </a:r>
+            <a:endParaRPr lang="vi-VN" sz="1850"/>
+          </a:p>
+          <a:p>
+            <a:pPr algn="l">
+              <a:lnSpc>
+                <a:spcPct val="100000"/>
+              </a:lnSpc>
+              <a:buNone/>
+            </a:pPr>
+            <a:r>
+              <a:rPr lang="vi-VN" sz="1850" dirty="0">
+                <a:solidFill>
+                  <a:srgbClr val="16201D">
+                    <a:alpha val="100000"/>
+                  </a:srgbClr>
+                </a:solidFill>
+                <a:latin typeface="Zen Kaku Gothic New"/>
+                <a:cs typeface="Zen Kaku Gothic New"/>
+              </a:rPr>
+              <a:t>残りは、歩きながら決める。</a:t>
             </a:r>
             <a:endParaRPr lang="vi-VN" sz="1850"/>
           </a:p>
@@ -253,7 +342,7 @@
       </p:sp>
       <p:sp>
         <p:nvSpPr>
-          <p:cNvPr id="7" name="Text"/>
+          <p:cNvPr id="8" name="Text"/>
           <p:cNvSpPr txBox="1"/>
           <p:nvPr/>
         </p:nvSpPr>
@@ -410,7 +499,7 @@
                                           </p:stCondLst>
                                         </p:cTn>
                                         <p:tgtEl>
-                                          <p:spTgt spid="7"/>
+                                          <p:spTgt spid="8"/>
                                         </p:tgtEl>
                                         <p:attrNameLst>
                                           <p:attrName>style.visibility</p:attrName>
@@ -424,7 +513,7 @@
                                       <p:cBhvr>
                                         <p:cTn id="11" dur="500"/>
                                         <p:tgtEl>
-                                          <p:spTgt spid="7"/>
+                                          <p:spTgt spid="8"/>
                                         </p:tgtEl>
                                       </p:cBhvr>
                                     </p:animEffect>
@@ -434,7 +523,7 @@
                               <p:par>
                                 <p:cTn id="16" presetID="42" presetClass="entr" presetSubtype="0" fill="hold" grpId="0" nodeType="withEffect">
                                   <p:stCondLst>
-                                    <p:cond delay="220"/>
+                                    <p:cond delay="110"/>
                                   </p:stCondLst>
                                   <p:childTnLst>
                                     <p:set>
@@ -468,6 +557,64 @@
                                         <p:cTn id="15" dur="600" fill="hold"/>
                                         <p:tgtEl>
                                           <p:spTgt spid="6"/>
+                                        </p:tgtEl>
+                                        <p:attrNameLst>
+                                          <p:attrName>ppt_y</p:attrName>
+                                        </p:attrNameLst>
+                                      </p:cBhvr>
+                                      <p:tavLst>
+                                        <p:tav tm="0">
+                                          <p:val>
+                                            <p:strVal val="#ppt_y+0.03"/>
+                                          </p:val>
+                                        </p:tav>
+                                        <p:tav tm="100000">
+                                          <p:val>
+                                            <p:strVal val="#ppt_y"/>
+                                          </p:val>
+                                        </p:tav>
+                                      </p:tavLst>
+                                    </p:anim>
+                                  </p:childTnLst>
+                                </p:cTn>
+                              </p:par>
+                              <p:par>
+                                <p:cTn id="20" presetID="42" presetClass="entr" presetSubtype="0" fill="hold" grpId="0" nodeType="withEffect">
+                                  <p:stCondLst>
+                                    <p:cond delay="220"/>
+                                  </p:stCondLst>
+                                  <p:childTnLst>
+                                    <p:set>
+                                      <p:cBhvr>
+                                        <p:cTn id="17" dur="1" fill="hold">
+                                          <p:stCondLst>
+                                            <p:cond delay="0"/>
+                                          </p:stCondLst>
+                                        </p:cTn>
+                                        <p:tgtEl>
+                                          <p:spTgt spid="7"/>
+                                        </p:tgtEl>
+                                        <p:attrNameLst>
+                                          <p:attrName>style.visibility</p:attrName>
+                                        </p:attrNameLst>
+                                      </p:cBhvr>
+                                      <p:to>
+                                        <p:strVal val="visible"/>
+                                      </p:to>
+                                    </p:set>
+                                    <p:animEffect transition="in" filter="fade">
+                                      <p:cBhvr>
+                                        <p:cTn id="18" dur="600"/>
+                                        <p:tgtEl>
+                                          <p:spTgt spid="7"/>
+                                        </p:tgtEl>
+                                      </p:cBhvr>
+                                    </p:animEffect>
+                                    <p:anim calcmode="lin" valueType="num">
+                                      <p:cBhvr>
+                                        <p:cTn id="19" dur="600" fill="hold"/>
+                                        <p:tgtEl>
+                                          <p:spTgt spid="7"/>
                                         </p:tgtEl>
                                         <p:attrNameLst>
                                           <p:attrName>ppt_y</p:attrName>
@@ -520,6 +667,7 @@
       <p:bldP spid="5" grpId="0" animBg="1"/>
       <p:bldP spid="6" grpId="0" animBg="1"/>
       <p:bldP spid="7" grpId="0" animBg="1"/>
+      <p:bldP spid="8" grpId="0" animBg="1"/>
     </p:bldLst>
   </p:timing>
 </p:sld>
@@ -683,6 +831,74 @@
         </p:nvSpPr>
         <p:spPr>
           <a:xfrm>
+            <a:off x="698500" y="1492250"/>
+            <a:ext cx="6985000" cy="2254250"/>
+          </a:xfrm>
+          <a:prstGeom prst="rect">
+            <a:avLst/>
+          </a:prstGeom>
+          <a:noFill/>
+          <a:ln>
+            <a:noFill/>
+          </a:ln>
+        </p:spPr>
+        <p:txBody>
+          <a:bodyPr wrap="square" lIns="0" tIns="0" rIns="0" bIns="0" anchor="t" rtlCol="0">
+            <a:noAutofit/>
+          </a:bodyPr>
+          <a:lstStyle/>
+          <a:p>
+            <a:pPr algn="l">
+              <a:lnSpc>
+                <a:spcPct val="100000"/>
+              </a:lnSpc>
+              <a:buNone/>
+            </a:pPr>
+            <a:r>
+              <a:rPr lang="vi-VN" sz="5750" b="1" dirty="0">
+                <a:solidFill>
+                  <a:srgbClr val="16201D">
+                    <a:alpha val="100000"/>
+                  </a:srgbClr>
+                </a:solidFill>
+                <a:latin typeface="Zen Kaku Gothic New"/>
+                <a:cs typeface="Zen Kaku Gothic New"/>
+              </a:rPr>
+              <a:t>目的地を、</a:t>
+            </a:r>
+            <a:endParaRPr lang="vi-VN" sz="5750"/>
+          </a:p>
+          <a:p>
+            <a:pPr algn="l">
+              <a:lnSpc>
+                <a:spcPct val="100000"/>
+              </a:lnSpc>
+              <a:buNone/>
+            </a:pPr>
+            <a:r>
+              <a:rPr lang="vi-VN" sz="5750" b="1" dirty="0">
+                <a:solidFill>
+                  <a:srgbClr val="16201D">
+                    <a:alpha val="100000"/>
+                  </a:srgbClr>
+                </a:solidFill>
+                <a:latin typeface="Zen Kaku Gothic New"/>
+                <a:cs typeface="Zen Kaku Gothic New"/>
+              </a:rPr>
+              <a:t>ひとつ減らす。</a:t>
+            </a:r>
+            <a:endParaRPr lang="vi-VN" sz="5750"/>
+          </a:p>
+        </p:txBody>
+      </p:sp>
+      <p:sp>
+        <p:nvSpPr>
+          <p:cNvPr id="7" name="Text"/>
+          <p:cNvSpPr txBox="1"/>
+          <p:nvPr/>
+        </p:nvSpPr>
+        <p:spPr>
+          <a:xfrm>
             <a:off x="698500" y="4095750"/>
             <a:ext cx="6985000" cy="1301750"/>
           </a:xfrm>
@@ -716,7 +932,28 @@
                 <a:latin typeface="Zen Kaku Gothic New"/>
                 <a:cs typeface="Zen Kaku Gothic New"/>
               </a:rPr>
-              <a:t>予定に空白があると、 曲がり角を選び直せる。</a:t>
+              <a:t>予定に空白があると、</a:t>
+            </a:r>
+            <a:endParaRPr lang="vi-VN" sz="1850"/>
+          </a:p>
+          <a:p>
+            <a:pPr algn="l">
+              <a:lnSpc>
+                <a:spcPct val="100000"/>
+              </a:lnSpc>
+              <a:buNone/>
+            </a:pPr>
+            <a:r>
+              <a:rPr lang="vi-VN" sz="1850" dirty="0">
+                <a:solidFill>
+                  <a:srgbClr val="16201D">
+                    <a:alpha val="100000"/>
+                  </a:srgbClr>
+                </a:solidFill>
+                <a:latin typeface="Zen Kaku Gothic New"/>
+                <a:cs typeface="Zen Kaku Gothic New"/>
+              </a:rPr>
+              <a:t>曲がり角を選び直せる。</a:t>
             </a:r>
             <a:endParaRPr lang="vi-VN" sz="1850"/>
           </a:p>
@@ -724,7 +961,7 @@
       </p:sp>
       <p:sp>
         <p:nvSpPr>
-          <p:cNvPr id="7" name="Text"/>
+          <p:cNvPr id="8" name="Text"/>
           <p:cNvSpPr txBox="1"/>
           <p:nvPr/>
         </p:nvSpPr>
@@ -881,7 +1118,7 @@
                                           </p:stCondLst>
                                         </p:cTn>
                                         <p:tgtEl>
-                                          <p:spTgt spid="7"/>
+                                          <p:spTgt spid="8"/>
                                         </p:tgtEl>
                                         <p:attrNameLst>
                                           <p:attrName>style.visibility</p:attrName>
@@ -895,7 +1132,7 @@
                                       <p:cBhvr>
                                         <p:cTn id="11" dur="500"/>
                                         <p:tgtEl>
-                                          <p:spTgt spid="7"/>
+                                          <p:spTgt spid="8"/>
                                         </p:tgtEl>
                                       </p:cBhvr>
                                     </p:animEffect>
@@ -905,7 +1142,7 @@
                               <p:par>
                                 <p:cTn id="16" presetID="42" presetClass="entr" presetSubtype="0" fill="hold" grpId="0" nodeType="withEffect">
                                   <p:stCondLst>
-                                    <p:cond delay="220"/>
+                                    <p:cond delay="110"/>
                                   </p:stCondLst>
                                   <p:childTnLst>
                                     <p:set>
@@ -939,6 +1176,64 @@
                                         <p:cTn id="15" dur="600" fill="hold"/>
                                         <p:tgtEl>
                                           <p:spTgt spid="6"/>
+                                        </p:tgtEl>
+                                        <p:attrNameLst>
+                                          <p:attrName>ppt_y</p:attrName>
+                                        </p:attrNameLst>
+                                      </p:cBhvr>
+                                      <p:tavLst>
+                                        <p:tav tm="0">
+                                          <p:val>
+                                            <p:strVal val="#ppt_y+0.03"/>
+                                          </p:val>
+                                        </p:tav>
+                                        <p:tav tm="100000">
+                                          <p:val>
+                                            <p:strVal val="#ppt_y"/>
+                                          </p:val>
+                                        </p:tav>
+                                      </p:tavLst>
+                                    </p:anim>
+                                  </p:childTnLst>
+                                </p:cTn>
+                              </p:par>
+                              <p:par>
+                                <p:cTn id="20" presetID="42" presetClass="entr" presetSubtype="0" fill="hold" grpId="0" nodeType="withEffect">
+                                  <p:stCondLst>
+                                    <p:cond delay="220"/>
+                                  </p:stCondLst>
+                                  <p:childTnLst>
+                                    <p:set>
+                                      <p:cBhvr>
+                                        <p:cTn id="17" dur="1" fill="hold">
+                                          <p:stCondLst>
+                                            <p:cond delay="0"/>
+                                          </p:stCondLst>
+                                        </p:cTn>
+                                        <p:tgtEl>
+                                          <p:spTgt spid="7"/>
+                                        </p:tgtEl>
+                                        <p:attrNameLst>
+                                          <p:attrName>style.visibility</p:attrName>
+                                        </p:attrNameLst>
+                                      </p:cBhvr>
+                                      <p:to>
+                                        <p:strVal val="visible"/>
+                                      </p:to>
+                                    </p:set>
+                                    <p:animEffect transition="in" filter="fade">
+                                      <p:cBhvr>
+                                        <p:cTn id="18" dur="600"/>
+                                        <p:tgtEl>
+                                          <p:spTgt spid="7"/>
+                                        </p:tgtEl>
+                                      </p:cBhvr>
+                                    </p:animEffect>
+                                    <p:anim calcmode="lin" valueType="num">
+                                      <p:cBhvr>
+                                        <p:cTn id="19" dur="600" fill="hold"/>
+                                        <p:tgtEl>
+                                          <p:spTgt spid="7"/>
                                         </p:tgtEl>
                                         <p:attrNameLst>
                                           <p:attrName>ppt_y</p:attrName>
@@ -991,6 +1286,7 @@
       <p:bldP spid="5" grpId="0" animBg="1"/>
       <p:bldP spid="6" grpId="0" animBg="1"/>
       <p:bldP spid="7" grpId="0" animBg="1"/>
+      <p:bldP spid="8" grpId="0" animBg="1"/>
     </p:bldLst>
   </p:timing>
 </p:sld>
@@ -1178,6 +1474,74 @@
         </p:nvSpPr>
         <p:spPr>
           <a:xfrm>
+            <a:off x="6604000" y="1397000"/>
+            <a:ext cx="4889500" cy="2254250"/>
+          </a:xfrm>
+          <a:prstGeom prst="rect">
+            <a:avLst/>
+          </a:prstGeom>
+          <a:noFill/>
+          <a:ln>
+            <a:noFill/>
+          </a:ln>
+        </p:spPr>
+        <p:txBody>
+          <a:bodyPr wrap="square" lIns="0" tIns="0" rIns="0" bIns="0" anchor="t" rtlCol="0">
+            <a:noAutofit/>
+          </a:bodyPr>
+          <a:lstStyle/>
+          <a:p>
+            <a:pPr algn="l">
+              <a:lnSpc>
+                <a:spcPct val="100000"/>
+              </a:lnSpc>
+              <a:buNone/>
+            </a:pPr>
+            <a:r>
+              <a:rPr lang="vi-VN" sz="4900" b="1" dirty="0">
+                <a:solidFill>
+                  <a:srgbClr val="16201D">
+                    <a:alpha val="100000"/>
+                  </a:srgbClr>
+                </a:solidFill>
+                <a:latin typeface="Zen Kaku Gothic New"/>
+                <a:cs typeface="Zen Kaku Gothic New"/>
+              </a:rPr>
+              <a:t>曲がる理由は、</a:t>
+            </a:r>
+            <a:endParaRPr lang="vi-VN" sz="4900"/>
+          </a:p>
+          <a:p>
+            <a:pPr algn="l">
+              <a:lnSpc>
+                <a:spcPct val="100000"/>
+              </a:lnSpc>
+              <a:buNone/>
+            </a:pPr>
+            <a:r>
+              <a:rPr lang="vi-VN" sz="4900" b="1" dirty="0">
+                <a:solidFill>
+                  <a:srgbClr val="16201D">
+                    <a:alpha val="100000"/>
+                  </a:srgbClr>
+                </a:solidFill>
+                <a:latin typeface="Zen Kaku Gothic New"/>
+                <a:cs typeface="Zen Kaku Gothic New"/>
+              </a:rPr>
+              <a:t>気分でいい。</a:t>
+            </a:r>
+            <a:endParaRPr lang="vi-VN" sz="4900"/>
+          </a:p>
+        </p:txBody>
+      </p:sp>
+      <p:sp>
+        <p:nvSpPr>
+          <p:cNvPr id="8" name="Text"/>
+          <p:cNvSpPr txBox="1"/>
+          <p:nvPr/>
+        </p:nvSpPr>
+        <p:spPr>
+          <a:xfrm>
             <a:off x="6604000" y="3206750"/>
             <a:ext cx="4889500" cy="1301750"/>
           </a:xfrm>
@@ -1211,7 +1575,28 @@
                 <a:latin typeface="Zen Kaku Gothic New"/>
                 <a:cs typeface="Zen Kaku Gothic New"/>
               </a:rPr>
-              <a:t>明るい通り。静かな道。 どちらも、今日は仮の選択肢。</a:t>
+              <a:t>明るい通り。静かな道。</a:t>
+            </a:r>
+            <a:endParaRPr lang="vi-VN" sz="1850"/>
+          </a:p>
+          <a:p>
+            <a:pPr algn="l">
+              <a:lnSpc>
+                <a:spcPct val="100000"/>
+              </a:lnSpc>
+              <a:buNone/>
+            </a:pPr>
+            <a:r>
+              <a:rPr lang="vi-VN" sz="1850" dirty="0">
+                <a:solidFill>
+                  <a:srgbClr val="16201D">
+                    <a:alpha val="100000"/>
+                  </a:srgbClr>
+                </a:solidFill>
+                <a:latin typeface="Zen Kaku Gothic New"/>
+                <a:cs typeface="Zen Kaku Gothic New"/>
+              </a:rPr>
+              <a:t>どちらも、今日は仮の選択肢。</a:t>
             </a:r>
             <a:endParaRPr lang="vi-VN" sz="1850"/>
           </a:p>
@@ -1219,7 +1604,7 @@
       </p:sp>
       <p:sp>
         <p:nvSpPr>
-          <p:cNvPr id="8" name="Text"/>
+          <p:cNvPr id="9" name="Text"/>
           <p:cNvSpPr txBox="1"/>
           <p:nvPr/>
         </p:nvSpPr>
@@ -1264,6 +1649,37 @@
           </a:p>
         </p:txBody>
       </p:sp>
+      <p:pic>
+        <p:nvPicPr>
+          <p:cNvPr id="10" name="Drawing"/>
+          <p:cNvPicPr>
+            <a:picLocks noChangeAspect="1"/>
+          </p:cNvPicPr>
+          <p:nvPr/>
+        </p:nvPicPr>
+        <p:blipFill>
+          <a:blip r:embed="rIdP1">
+            <a:extLst>
+              <a:ext uri="{96DAC541-7B7A-43D3-8B79-37D633B846F1}">
+                <asvg:svgBlip xmlns:asvg="http://schemas.microsoft.com/office/drawing/2016/SVG/main" r:embed="rIdS1"/>
+              </a:ext>
+            </a:extLst>
+          </a:blip>
+          <a:srcRect/>
+          <a:stretch>
+            <a:fillRect/>
+          </a:stretch>
+        </p:blipFill>
+        <p:spPr>
+          <a:xfrm>
+            <a:off x="603250" y="1587500"/>
+            <a:ext cx="4921250" cy="3619500"/>
+          </a:xfrm>
+          <a:prstGeom prst="rect">
+            <a:avLst/>
+          </a:prstGeom>
+        </p:spPr>
+      </p:pic>
     </p:spTree>
   </p:cSld>
   <p:clrMapOvr>
@@ -1376,7 +1792,7 @@
                                           </p:stCondLst>
                                         </p:cTn>
                                         <p:tgtEl>
-                                          <p:spTgt spid="8"/>
+                                          <p:spTgt spid="9"/>
                                         </p:tgtEl>
                                         <p:attrNameLst>
                                           <p:attrName>style.visibility</p:attrName>
@@ -1390,7 +1806,7 @@
                                       <p:cBhvr>
                                         <p:cTn id="11" dur="500"/>
                                         <p:tgtEl>
-                                          <p:spTgt spid="8"/>
+                                          <p:spTgt spid="9"/>
                                         </p:tgtEl>
                                       </p:cBhvr>
                                     </p:animEffect>
@@ -1398,20 +1814,113 @@
                                 </p:cTn>
                               </p:par>
                               <p:par>
-                                <p:cTn id="16" presetID="42" presetClass="entr" presetSubtype="0" fill="hold" grpId="0" nodeType="withEffect">
+                                <p:cTn id="15" presetID="10" presetClass="entr" presetSubtype="0" fill="hold" grpId="0" nodeType="withEffect">
+                                  <p:stCondLst>
+                                    <p:cond delay="0"/>
+                                  </p:stCondLst>
+                                  <p:childTnLst>
+                                    <p:set>
+                                      <p:cBhvr>
+                                        <p:cTn id="13" dur="1" fill="hold">
+                                          <p:stCondLst>
+                                            <p:cond delay="0"/>
+                                          </p:stCondLst>
+                                        </p:cTn>
+                                        <p:tgtEl>
+                                          <p:spTgt spid="10"/>
+                                        </p:tgtEl>
+                                        <p:attrNameLst>
+                                          <p:attrName>style.visibility</p:attrName>
+                                        </p:attrNameLst>
+                                      </p:cBhvr>
+                                      <p:to>
+                                        <p:strVal val="visible"/>
+                                      </p:to>
+                                    </p:set>
+                                    <p:animEffect transition="in" filter="fade">
+                                      <p:cBhvr>
+                                        <p:cTn id="14" dur="500"/>
+                                        <p:tgtEl>
+                                          <p:spTgt spid="10"/>
+                                        </p:tgtEl>
+                                      </p:cBhvr>
+                                    </p:animEffect>
+                                  </p:childTnLst>
+                                </p:cTn>
+                              </p:par>
+                              <p:par>
+                                <p:cTn id="19" presetID="42" presetClass="entr" presetSubtype="0" fill="hold" grpId="0" nodeType="withEffect">
+                                  <p:stCondLst>
+                                    <p:cond delay="110"/>
+                                  </p:stCondLst>
+                                  <p:childTnLst>
+                                    <p:set>
+                                      <p:cBhvr>
+                                        <p:cTn id="16" dur="1" fill="hold">
+                                          <p:stCondLst>
+                                            <p:cond delay="0"/>
+                                          </p:stCondLst>
+                                        </p:cTn>
+                                        <p:tgtEl>
+                                          <p:spTgt spid="7"/>
+                                        </p:tgtEl>
+                                        <p:attrNameLst>
+                                          <p:attrName>style.visibility</p:attrName>
+                                        </p:attrNameLst>
+                                      </p:cBhvr>
+                                      <p:to>
+                                        <p:strVal val="visible"/>
+                                      </p:to>
+                                    </p:set>
+                                    <p:animEffect transition="in" filter="fade">
+                                      <p:cBhvr>
+                                        <p:cTn id="17" dur="600"/>
+                                        <p:tgtEl>
+                                          <p:spTgt spid="7"/>
+                                        </p:tgtEl>
+                                      </p:cBhvr>
+                                    </p:animEffect>
+                                    <p:anim calcmode="lin" valueType="num">
+                                      <p:cBhvr>
+                                        <p:cTn id="18" dur="600" fill="hold"/>
+                                        <p:tgtEl>
+                                          <p:spTgt spid="7"/>
+                                        </p:tgtEl>
+                                        <p:attrNameLst>
+                                          <p:attrName>ppt_y</p:attrName>
+                                        </p:attrNameLst>
+                                      </p:cBhvr>
+                                      <p:tavLst>
+                                        <p:tav tm="0">
+                                          <p:val>
+                                            <p:strVal val="#ppt_y+0.03"/>
+                                          </p:val>
+                                        </p:tav>
+                                        <p:tav tm="100000">
+                                          <p:val>
+                                            <p:strVal val="#ppt_y"/>
+                                          </p:val>
+                                        </p:tav>
+                                      </p:tavLst>
+                                    </p:anim>
+                                  </p:childTnLst>
+                                </p:cTn>
+                              </p:par>
+                              <p:par>
+                                <p:cTn id="23" presetID="42" presetClass="entr" presetSubtype="0" fill="hold" grpId="0" nodeType="withEffect">
                                   <p:stCondLst>
                                     <p:cond delay="220"/>
                                   </p:stCondLst>
                                   <p:childTnLst>
                                     <p:set>
                                       <p:cBhvr>
-                                        <p:cTn id="13" dur="1" fill="hold">
+                                        <p:cTn id="20" dur="1" fill="hold">
                                           <p:stCondLst>
                                             <p:cond delay="0"/>
                                           </p:stCondLst>
                                         </p:cTn>
                                         <p:tgtEl>
-                                          <p:spTgt spid="7"/>
+                                          <p:spTgt spid="8"/>
                                         </p:tgtEl>
                                         <p:attrNameLst>
                                           <p:attrName>style.visibility</p:attrName>
@@ -1423,17 +1932,17 @@
                                     </p:set>
                                     <p:animEffect transition="in" filter="fade">
                                       <p:cBhvr>
-                                        <p:cTn id="14" dur="600"/>
-                                        <p:tgtEl>
-                                          <p:spTgt spid="7"/>
+                                        <p:cTn id="21" dur="600"/>
+                                        <p:tgtEl>
+                                          <p:spTgt spid="8"/>
                                         </p:tgtEl>
                                       </p:cBhvr>
                                     </p:animEffect>
                                     <p:anim calcmode="lin" valueType="num">
                                       <p:cBhvr>
-                                        <p:cTn id="15" dur="600" fill="hold"/>
-                                        <p:tgtEl>
-                                          <p:spTgt spid="7"/>
+                                        <p:cTn id="22" dur="600" fill="hold"/>
+                                        <p:tgtEl>
+                                          <p:spTgt spid="8"/>
                                         </p:tgtEl>
                                         <p:attrNameLst>
                                           <p:attrName>ppt_y</p:attrName>
@@ -1486,6 +1995,7 @@
       <p:bldP spid="6" grpId="0" animBg="1"/>
       <p:bldP spid="7" grpId="0" animBg="1"/>
       <p:bldP spid="8" grpId="0" animBg="1"/>
+      <p:bldP spid="9" grpId="0" animBg="1"/>
     </p:bldLst>
   </p:timing>
 </p:sld>
@@ -1651,6 +2161,74 @@
         </p:nvSpPr>
         <p:spPr>
           <a:xfrm>
+            <a:off x="698500" y="1492250"/>
+            <a:ext cx="6985000" cy="2254250"/>
+          </a:xfrm>
+          <a:prstGeom prst="rect">
+            <a:avLst/>
+          </a:prstGeom>
+          <a:noFill/>
+          <a:ln>
+            <a:noFill/>
+          </a:ln>
+        </p:spPr>
+        <p:txBody>
+          <a:bodyPr wrap="square" lIns="0" tIns="0" rIns="0" bIns="0" anchor="t" rtlCol="0">
+            <a:noAutofit/>
+          </a:bodyPr>
+          <a:lstStyle/>
+          <a:p>
+            <a:pPr algn="l">
+              <a:lnSpc>
+                <a:spcPct val="100000"/>
+              </a:lnSpc>
+              <a:buNone/>
+            </a:pPr>
+            <a:r>
+              <a:rPr lang="vi-VN" sz="5750" b="1" dirty="0">
+                <a:solidFill>
+                  <a:srgbClr val="16201D">
+                    <a:alpha val="100000"/>
+                  </a:srgbClr>
+                </a:solidFill>
+                <a:latin typeface="Zen Kaku Gothic New"/>
+                <a:cs typeface="Zen Kaku Gothic New"/>
+              </a:rPr>
+              <a:t>立ち止まる場所も、</a:t>
+            </a:r>
+            <a:endParaRPr lang="vi-VN" sz="5750"/>
+          </a:p>
+          <a:p>
+            <a:pPr algn="l">
+              <a:lnSpc>
+                <a:spcPct val="100000"/>
+              </a:lnSpc>
+              <a:buNone/>
+            </a:pPr>
+            <a:r>
+              <a:rPr lang="vi-VN" sz="5750" b="1" dirty="0">
+                <a:solidFill>
+                  <a:srgbClr val="16201D">
+                    <a:alpha val="100000"/>
+                  </a:srgbClr>
+                </a:solidFill>
+                <a:latin typeface="Zen Kaku Gothic New"/>
+                <a:cs typeface="Zen Kaku Gothic New"/>
+              </a:rPr>
+              <a:t>予定のひとつ。</a:t>
+            </a:r>
+            <a:endParaRPr lang="vi-VN" sz="5750"/>
+          </a:p>
+        </p:txBody>
+      </p:sp>
+      <p:sp>
+        <p:nvSpPr>
+          <p:cNvPr id="7" name="Text"/>
+          <p:cNvSpPr txBox="1"/>
+          <p:nvPr/>
+        </p:nvSpPr>
+        <p:spPr>
+          <a:xfrm>
             <a:off x="698500" y="4095750"/>
             <a:ext cx="6985000" cy="1301750"/>
           </a:xfrm>
@@ -1684,7 +2262,28 @@
                 <a:latin typeface="Zen Kaku Gothic New"/>
                 <a:cs typeface="Zen Kaku Gothic New"/>
               </a:rPr>
-              <a:t>眺める。メモする。何もしない。 途中で止まる時間を残す。</a:t>
+              <a:t>眺める。メモする。何もしない。</a:t>
+            </a:r>
+            <a:endParaRPr lang="vi-VN" sz="1850"/>
+          </a:p>
+          <a:p>
+            <a:pPr algn="l">
+              <a:lnSpc>
+                <a:spcPct val="100000"/>
+              </a:lnSpc>
+              <a:buNone/>
+            </a:pPr>
+            <a:r>
+              <a:rPr lang="vi-VN" sz="1850" dirty="0">
+                <a:solidFill>
+                  <a:srgbClr val="16201D">
+                    <a:alpha val="100000"/>
+                  </a:srgbClr>
+                </a:solidFill>
+                <a:latin typeface="Zen Kaku Gothic New"/>
+                <a:cs typeface="Zen Kaku Gothic New"/>
+              </a:rPr>
+              <a:t>途中で止まる時間を残す。</a:t>
             </a:r>
             <a:endParaRPr lang="vi-VN" sz="1850"/>
           </a:p>
@@ -1692,7 +2291,7 @@
       </p:sp>
       <p:sp>
         <p:nvSpPr>
-          <p:cNvPr id="7" name="Text"/>
+          <p:cNvPr id="8" name="Text"/>
           <p:cNvSpPr txBox="1"/>
           <p:nvPr/>
         </p:nvSpPr>
@@ -1849,7 +2448,7 @@
                                           </p:stCondLst>
                                         </p:cTn>
                                         <p:tgtEl>
-                                          <p:spTgt spid="7"/>
+                                          <p:spTgt spid="8"/>
                                         </p:tgtEl>
                                         <p:attrNameLst>
                                           <p:attrName>style.visibility</p:attrName>
@@ -1863,7 +2462,7 @@
                                       <p:cBhvr>
                                         <p:cTn id="11" dur="500"/>
                                         <p:tgtEl>
-                                          <p:spTgt spid="7"/>
+                                          <p:spTgt spid="8"/>
                                         </p:tgtEl>
                                       </p:cBhvr>
                                     </p:animEffect>
@@ -1873,7 +2472,7 @@
                               <p:par>
                                 <p:cTn id="16" presetID="42" presetClass="entr" presetSubtype="0" fill="hold" grpId="0" nodeType="withEffect">
                                   <p:stCondLst>
-                                    <p:cond delay="220"/>
+                                    <p:cond delay="110"/>
                                   </p:stCondLst>
                                   <p:childTnLst>
                                     <p:set>
@@ -1907,6 +2506,64 @@
                                         <p:cTn id="15" dur="600" fill="hold"/>
                                         <p:tgtEl>
                                           <p:spTgt spid="6"/>
+                                        </p:tgtEl>
+                                        <p:attrNameLst>
+                                          <p:attrName>ppt_y</p:attrName>
+                                        </p:attrNameLst>
+                                      </p:cBhvr>
+                                      <p:tavLst>
+                                        <p:tav tm="0">
+                                          <p:val>
+                                            <p:strVal val="#ppt_y+0.03"/>
+                                          </p:val>
+                                        </p:tav>
+                                        <p:tav tm="100000">
+                                          <p:val>
+                                            <p:strVal val="#ppt_y"/>
+                                          </p:val>
+                                        </p:tav>
+                                      </p:tavLst>
+                                    </p:anim>
+                                  </p:childTnLst>
+                                </p:cTn>
+                              </p:par>
+                              <p:par>
+                                <p:cTn id="20" presetID="42" presetClass="entr" presetSubtype="0" fill="hold" grpId="0" nodeType="withEffect">
+                                  <p:stCondLst>
+                                    <p:cond delay="220"/>
+                                  </p:stCondLst>
+                                  <p:childTnLst>
+                                    <p:set>
+                                      <p:cBhvr>
+                                        <p:cTn id="17" dur="1" fill="hold">
+                                          <p:stCondLst>
+                                            <p:cond delay="0"/>
+                                          </p:stCondLst>
+                                        </p:cTn>
+                                        <p:tgtEl>
+                                          <p:spTgt spid="7"/>
+                                        </p:tgtEl>
+                                        <p:attrNameLst>
+                                          <p:attrName>style.visibility</p:attrName>
+                                        </p:attrNameLst>
+                                      </p:cBhvr>
+                                      <p:to>
+                                        <p:strVal val="visible"/>
+                                      </p:to>
+                                    </p:set>
+                                    <p:animEffect transition="in" filter="fade">
+                                      <p:cBhvr>
+                                        <p:cTn id="18" dur="600"/>
+                                        <p:tgtEl>
+                                          <p:spTgt spid="7"/>
+                                        </p:tgtEl>
+                                      </p:cBhvr>
+                                    </p:animEffect>
+                                    <p:anim calcmode="lin" valueType="num">
+                                      <p:cBhvr>
+                                        <p:cTn id="19" dur="600" fill="hold"/>
+                                        <p:tgtEl>
+                                          <p:spTgt spid="7"/>
                                         </p:tgtEl>
                                         <p:attrNameLst>
                                           <p:attrName>ppt_y</p:attrName>
@@ -1959,6 +2616,7 @@
       <p:bldP spid="5" grpId="0" animBg="1"/>
       <p:bldP spid="6" grpId="0" animBg="1"/>
       <p:bldP spid="7" grpId="0" animBg="1"/>
+      <p:bldP spid="8" grpId="0" animBg="1"/>
     </p:bldLst>
   </p:timing>
 </p:sld>
@@ -2122,6 +2780,74 @@
         </p:nvSpPr>
         <p:spPr>
           <a:xfrm>
+            <a:off x="698500" y="1492250"/>
+            <a:ext cx="6985000" cy="2254250"/>
+          </a:xfrm>
+          <a:prstGeom prst="rect">
+            <a:avLst/>
+          </a:prstGeom>
+          <a:noFill/>
+          <a:ln>
+            <a:noFill/>
+          </a:ln>
+        </p:spPr>
+        <p:txBody>
+          <a:bodyPr wrap="square" lIns="0" tIns="0" rIns="0" bIns="0" anchor="t" rtlCol="0">
+            <a:noAutofit/>
+          </a:bodyPr>
+          <a:lstStyle/>
+          <a:p>
+            <a:pPr algn="l">
+              <a:lnSpc>
+                <a:spcPct val="100000"/>
+              </a:lnSpc>
+              <a:buNone/>
+            </a:pPr>
+            <a:r>
+              <a:rPr lang="vi-VN" sz="5750" b="1" dirty="0">
+                <a:solidFill>
+                  <a:srgbClr val="16201D">
+                    <a:alpha val="100000"/>
+                  </a:srgbClr>
+                </a:solidFill>
+                <a:latin typeface="Zen Kaku Gothic New"/>
+                <a:cs typeface="Zen Kaku Gothic New"/>
+              </a:rPr>
+              <a:t>帰り道には、</a:t>
+            </a:r>
+            <a:endParaRPr lang="vi-VN" sz="5750"/>
+          </a:p>
+          <a:p>
+            <a:pPr algn="l">
+              <a:lnSpc>
+                <a:spcPct val="100000"/>
+              </a:lnSpc>
+              <a:buNone/>
+            </a:pPr>
+            <a:r>
+              <a:rPr lang="vi-VN" sz="5750" b="1" dirty="0">
+                <a:solidFill>
+                  <a:srgbClr val="16201D">
+                    <a:alpha val="100000"/>
+                  </a:srgbClr>
+                </a:solidFill>
+                <a:latin typeface="Zen Kaku Gothic New"/>
+                <a:cs typeface="Zen Kaku Gothic New"/>
+              </a:rPr>
+              <a:t>違う曲がり角。</a:t>
+            </a:r>
+            <a:endParaRPr lang="vi-VN" sz="5750"/>
+          </a:p>
+        </p:txBody>
+      </p:sp>
+      <p:sp>
+        <p:nvSpPr>
+          <p:cNvPr id="7" name="Text"/>
+          <p:cNvSpPr txBox="1"/>
+          <p:nvPr/>
+        </p:nvSpPr>
+        <p:spPr>
+          <a:xfrm>
             <a:off x="698500" y="4095750"/>
             <a:ext cx="6985000" cy="1301750"/>
           </a:xfrm>
@@ -2155,7 +2881,28 @@
                 <a:latin typeface="Zen Kaku Gothic New"/>
                 <a:cs typeface="Zen Kaku Gothic New"/>
               </a:rPr>
-              <a:t>行きとは違う景色を、 帰りにひとつ見つける。</a:t>
+              <a:t>行きとは違う景色を、</a:t>
+            </a:r>
+            <a:endParaRPr lang="vi-VN" sz="1850"/>
+          </a:p>
+          <a:p>
+            <a:pPr algn="l">
+              <a:lnSpc>
+                <a:spcPct val="100000"/>
+              </a:lnSpc>
+              <a:buNone/>
+            </a:pPr>
+            <a:r>
+              <a:rPr lang="vi-VN" sz="1850" dirty="0">
+                <a:solidFill>
+                  <a:srgbClr val="16201D">
+                    <a:alpha val="100000"/>
+                  </a:srgbClr>
+                </a:solidFill>
+                <a:latin typeface="Zen Kaku Gothic New"/>
+                <a:cs typeface="Zen Kaku Gothic New"/>
+              </a:rPr>
+              <a:t>帰りにひとつ見つける。</a:t>
             </a:r>
             <a:endParaRPr lang="vi-VN" sz="1850"/>
           </a:p>
@@ -2163,7 +2910,7 @@
       </p:sp>
       <p:sp>
         <p:nvSpPr>
-          <p:cNvPr id="7" name="Text"/>
+          <p:cNvPr id="8" name="Text"/>
           <p:cNvSpPr txBox="1"/>
           <p:nvPr/>
         </p:nvSpPr>
@@ -2320,7 +3067,7 @@
                                           </p:stCondLst>
                                         </p:cTn>
                                         <p:tgtEl>
-                                          <p:spTgt spid="7"/>
+                                          <p:spTgt spid="8"/>
                                         </p:tgtEl>
                                         <p:attrNameLst>
                                           <p:attrName>style.visibility</p:attrName>
@@ -2334,7 +3081,7 @@
                                       <p:cBhvr>
                                         <p:cTn id="11" dur="500"/>
                                         <p:tgtEl>
-                                          <p:spTgt spid="7"/>
+                                          <p:spTgt spid="8"/>
                                         </p:tgtEl>
                                       </p:cBhvr>
                                     </p:animEffect>
@@ -2344,7 +3091,7 @@
                               <p:par>
                                 <p:cTn id="16" presetID="42" presetClass="entr" presetSubtype="0" fill="hold" grpId="0" nodeType="withEffect">
                                   <p:stCondLst>
-                                    <p:cond delay="220"/>
+                                    <p:cond delay="110"/>
                                   </p:stCondLst>
                                   <p:childTnLst>
                                     <p:set>
@@ -2378,6 +3125,64 @@
                                         <p:cTn id="15" dur="600" fill="hold"/>
                                         <p:tgtEl>
                                           <p:spTgt spid="6"/>
+                                        </p:tgtEl>
+                                        <p:attrNameLst>
+                                          <p:attrName>ppt_y</p:attrName>
+                                        </p:attrNameLst>
+                                      </p:cBhvr>
+                                      <p:tavLst>
+                                        <p:tav tm="0">
+                                          <p:val>
+                                            <p:strVal val="#ppt_y+0.03"/>
+                                          </p:val>
+                                        </p:tav>
+                                        <p:tav tm="100000">
+                                          <p:val>
+                                            <p:strVal val="#ppt_y"/>
+                                          </p:val>
+                                        </p:tav>
+                                      </p:tavLst>
+                                    </p:anim>
+                                  </p:childTnLst>
+                                </p:cTn>
+                              </p:par>
+                              <p:par>
+                                <p:cTn id="20" presetID="42" presetClass="entr" presetSubtype="0" fill="hold" grpId="0" nodeType="withEffect">
+                                  <p:stCondLst>
+                                    <p:cond delay="220"/>
+                                  </p:stCondLst>
+                                  <p:childTnLst>
+                                    <p:set>
+                                      <p:cBhvr>
+                                        <p:cTn id="17" dur="1" fill="hold">
+                                          <p:stCondLst>
+                                            <p:cond delay="0"/>
+                                          </p:stCondLst>
+                                        </p:cTn>
+                                        <p:tgtEl>
+                                          <p:spTgt spid="7"/>
+                                        </p:tgtEl>
+                                        <p:attrNameLst>
+                                          <p:attrName>style.visibility</p:attrName>
+                                        </p:attrNameLst>
+                                      </p:cBhvr>
+                                      <p:to>
+                                        <p:strVal val="visible"/>
+                                      </p:to>
+                                    </p:set>
+                                    <p:animEffect transition="in" filter="fade">
+                                      <p:cBhvr>
+                                        <p:cTn id="18" dur="600"/>
+                                        <p:tgtEl>
+                                          <p:spTgt spid="7"/>
+                                        </p:tgtEl>
+                                      </p:cBhvr>
+                                    </p:animEffect>
+                                    <p:anim calcmode="lin" valueType="num">
+                                      <p:cBhvr>
+                                        <p:cTn id="19" dur="600" fill="hold"/>
+                                        <p:tgtEl>
+                                          <p:spTgt spid="7"/>
                                         </p:tgtEl>
                                         <p:attrNameLst>
                                           <p:attrName>ppt_y</p:attrName>
@@ -2430,6 +3235,7 @@
       <p:bldP spid="5" grpId="0" animBg="1"/>
       <p:bldP spid="6" grpId="0" animBg="1"/>
       <p:bldP spid="7" grpId="0" animBg="1"/>
+      <p:bldP spid="8" grpId="0" animBg="1"/>
     </p:bldLst>
   </p:timing>
 </p:sld>
@@ -2593,6 +3399,74 @@
         </p:nvSpPr>
         <p:spPr>
           <a:xfrm>
+            <a:off x="698500" y="1492250"/>
+            <a:ext cx="6985000" cy="2254250"/>
+          </a:xfrm>
+          <a:prstGeom prst="rect">
+            <a:avLst/>
+          </a:prstGeom>
+          <a:noFill/>
+          <a:ln>
+            <a:noFill/>
+          </a:ln>
+        </p:spPr>
+        <p:txBody>
+          <a:bodyPr wrap="square" lIns="0" tIns="0" rIns="0" bIns="0" anchor="t" rtlCol="0">
+            <a:noAutofit/>
+          </a:bodyPr>
+          <a:lstStyle/>
+          <a:p>
+            <a:pPr algn="l">
+              <a:lnSpc>
+                <a:spcPct val="100000"/>
+              </a:lnSpc>
+              <a:buNone/>
+            </a:pPr>
+            <a:r>
+              <a:rPr lang="vi-VN" sz="5750" b="1" dirty="0">
+                <a:solidFill>
+                  <a:srgbClr val="16201D">
+                    <a:alpha val="100000"/>
+                  </a:srgbClr>
+                </a:solidFill>
+                <a:latin typeface="Zen Kaku Gothic New"/>
+                <a:cs typeface="Zen Kaku Gothic New"/>
+              </a:rPr>
+              <a:t>歩いたあとに、</a:t>
+            </a:r>
+            <a:endParaRPr lang="vi-VN" sz="5750"/>
+          </a:p>
+          <a:p>
+            <a:pPr algn="l">
+              <a:lnSpc>
+                <a:spcPct val="100000"/>
+              </a:lnSpc>
+              <a:buNone/>
+            </a:pPr>
+            <a:r>
+              <a:rPr lang="vi-VN" sz="5750" b="1" dirty="0">
+                <a:solidFill>
+                  <a:srgbClr val="16201D">
+                    <a:alpha val="100000"/>
+                  </a:srgbClr>
+                </a:solidFill>
+                <a:latin typeface="Zen Kaku Gothic New"/>
+                <a:cs typeface="Zen Kaku Gothic New"/>
+              </a:rPr>
+              <a:t>次の寄り道を。</a:t>
+            </a:r>
+            <a:endParaRPr lang="vi-VN" sz="5750"/>
+          </a:p>
+        </p:txBody>
+      </p:sp>
+      <p:sp>
+        <p:nvSpPr>
+          <p:cNvPr id="7" name="Text"/>
+          <p:cNvSpPr txBox="1"/>
+          <p:nvPr/>
+        </p:nvSpPr>
+        <p:spPr>
+          <a:xfrm>
             <a:off x="698500" y="4095750"/>
             <a:ext cx="6985000" cy="1301750"/>
           </a:xfrm>
@@ -2626,7 +3500,28 @@
                 <a:latin typeface="Zen Kaku Gothic New"/>
                 <a:cs typeface="Zen Kaku Gothic New"/>
               </a:rPr>
-              <a:t>見つけたことを一言だけ。 次に歩くときの入口に。</a:t>
+              <a:t>見つけたことを一言だけ。</a:t>
+            </a:r>
+            <a:endParaRPr lang="vi-VN" sz="1850"/>
+          </a:p>
+          <a:p>
+            <a:pPr algn="l">
+              <a:lnSpc>
+                <a:spcPct val="100000"/>
+              </a:lnSpc>
+              <a:buNone/>
+            </a:pPr>
+            <a:r>
+              <a:rPr lang="vi-VN" sz="1850" dirty="0">
+                <a:solidFill>
+                  <a:srgbClr val="16201D">
+                    <a:alpha val="100000"/>
+                  </a:srgbClr>
+                </a:solidFill>
+                <a:latin typeface="Zen Kaku Gothic New"/>
+                <a:cs typeface="Zen Kaku Gothic New"/>
+              </a:rPr>
+              <a:t>次に歩くときの入口に。</a:t>
             </a:r>
             <a:endParaRPr lang="vi-VN" sz="1850"/>
           </a:p>
@@ -2634,7 +3529,7 @@
       </p:sp>
       <p:sp>
         <p:nvSpPr>
-          <p:cNvPr id="7" name="Text"/>
+          <p:cNvPr id="8" name="Text"/>
           <p:cNvSpPr txBox="1"/>
           <p:nvPr/>
         </p:nvSpPr>
@@ -2791,7 +3686,7 @@
                                           </p:stCondLst>
                                         </p:cTn>
                                         <p:tgtEl>
-                                          <p:spTgt spid="7"/>
+                                          <p:spTgt spid="8"/>
                                         </p:tgtEl>
                                         <p:attrNameLst>
                                           <p:attrName>style.visibility</p:attrName>
@@ -2805,7 +3700,7 @@
                                       <p:cBhvr>
                                         <p:cTn id="11" dur="500"/>
                                         <p:tgtEl>
-                                          <p:spTgt spid="7"/>
+                                          <p:spTgt spid="8"/>
                                         </p:tgtEl>
                                       </p:cBhvr>
                                     </p:animEffect>
@@ -2815,7 +3710,7 @@
                               <p:par>
                                 <p:cTn id="16" presetID="42" presetClass="entr" presetSubtype="0" fill="hold" grpId="0" nodeType="withEffect">
                                   <p:stCondLst>
-                                    <p:cond delay="220"/>
+                                    <p:cond delay="110"/>
                                   </p:stCondLst>
                                   <p:childTnLst>
                                     <p:set>
@@ -2849,6 +3744,64 @@
                                         <p:cTn id="15" dur="600" fill="hold"/>
                                         <p:tgtEl>
                                           <p:spTgt spid="6"/>
+                                        </p:tgtEl>
+                                        <p:attrNameLst>
+                                          <p:attrName>ppt_y</p:attrName>
+                                        </p:attrNameLst>
+                                      </p:cBhvr>
+                                      <p:tavLst>
+                                        <p:tav tm="0">
+                                          <p:val>
+                                            <p:strVal val="#ppt_y+0.03"/>
+                                          </p:val>
+                                        </p:tav>
+                                        <p:tav tm="100000">
+                                          <p:val>
+                                            <p:strVal val="#ppt_y"/>
+                                          </p:val>
+                                        </p:tav>
+                                      </p:tavLst>
+                                    </p:anim>
+                                  </p:childTnLst>
+                                </p:cTn>
+                              </p:par>
+                              <p:par>
+                                <p:cTn id="20" presetID="42" presetClass="entr" presetSubtype="0" fill="hold" grpId="0" nodeType="withEffect">
+                                  <p:stCondLst>
+                                    <p:cond delay="220"/>
+                                  </p:stCondLst>
+                                  <p:childTnLst>
+                                    <p:set>
+                                      <p:cBhvr>
+                                        <p:cTn id="17" dur="1" fill="hold">
+                                          <p:stCondLst>
+                                            <p:cond delay="0"/>
+                                          </p:stCondLst>
+                                        </p:cTn>
+                                        <p:tgtEl>
+                                          <p:spTgt spid="7"/>
+                                        </p:tgtEl>
+                                        <p:attrNameLst>
+                                          <p:attrName>style.visibility</p:attrName>
+                                        </p:attrNameLst>
+                                      </p:cBhvr>
+                                      <p:to>
+                                        <p:strVal val="visible"/>
+                                      </p:to>
+                                    </p:set>
+                                    <p:animEffect transition="in" filter="fade">
+                                      <p:cBhvr>
+                                        <p:cTn id="18" dur="600"/>
+                                        <p:tgtEl>
+                                          <p:spTgt spid="7"/>
+                                        </p:tgtEl>
+                                      </p:cBhvr>
+                                    </p:animEffect>
+                                    <p:anim calcmode="lin" valueType="num">
+                                      <p:cBhvr>
+                                        <p:cTn id="19" dur="600" fill="hold"/>
+                                        <p:tgtEl>
+                                          <p:spTgt spid="7"/>
                                         </p:tgtEl>
                                         <p:attrNameLst>
                                           <p:attrName>ppt_y</p:attrName>
@@ -2901,6 +3854,7 @@
       <p:bldP spid="5" grpId="0" animBg="1"/>
       <p:bldP spid="6" grpId="0" animBg="1"/>
       <p:bldP spid="7" grpId="0" animBg="1"/>
+      <p:bldP spid="8" grpId="0" animBg="1"/>
     </p:bldLst>
   </p:timing>
 </p:sld>
